--- a/courses/learn_legalization/module01-03-legality-metrics/slides.pptx
+++ b/courses/learn_legalization/module01-03-legality-metrics/slides.pptx
@@ -16,6 +16,9 @@
     <p:sldId id="264" r:id="rId16"/>
     <p:sldId id="265" r:id="rId17"/>
     <p:sldId id="266" r:id="rId18"/>
+    <p:sldId id="267" r:id="rId19"/>
+    <p:sldId id="268" r:id="rId20"/>
+    <p:sldId id="269" r:id="rId21"/>
   </p:sldIdLst>
   <p:sldSz cx="12191695" cy="6858000" type="screen4x3"/>
   <p:notesSz cx="6858000" cy="9144000"/>
@@ -582,7 +585,7 @@
           <a:lstStyle/>
           <a:p>
             <a:r>
-              <a:t>Common traps: assuming snap alone legalizes; forgetting site width when checking overlap; ignoring fixed macro D at (8, 4); reporting HPWL without legality; and comparing Abacus and Tetris without naming displacement versus wirelength tradeoffs.</a:t>
+              <a:t>In the browser lab track, open the **legality-metrics** lab from the tools shelf. Open the interactive lab, place or snap cells on the site and row grid—or use an Apply helper—then Check. Reveal golden is study-only. Work the challenges that lock the goldens, then come back to implement the same loop yourself.</a:t>
             </a:r>
           </a:p>
         </p:txBody>
@@ -652,6 +655,146 @@
           <a:lstStyle/>
           <a:p>
             <a:r>
+              <a:t>In the implement track, open this module's EXAMPLES.md Pseudocode section and the course common solvers. Parse `tiny_legal.json`, run the algorithm with deterministic coordinates, and print legality, displacement, and HPWL. Match the browser goldens before you claim the checklist.</a:t>
+            </a:r>
+          </a:p>
+        </p:txBody>
+      </p:sp>
+      <p:sp>
+        <p:nvSpPr>
+          <p:cNvPr id="4" name="Slide Number Placeholder 3"/>
+          <p:cNvSpPr>
+            <a:spLocks noGrp="1"/>
+          </p:cNvSpPr>
+          <p:nvPr>
+            <p:ph type="sldNum" idx="5" sz="quarter"/>
+          </p:nvPr>
+        </p:nvSpPr>
+        <p:spPr/>
+      </p:sp>
+    </p:spTree>
+  </p:cSld>
+  <p:clrMapOvr>
+    <a:masterClrMapping/>
+  </p:clrMapOvr>
+</p:notes>
+</file>
+
+<file path=ppt/notesSlides/notesSlide12.xml><?xml version="1.0" encoding="utf-8"?>
+<p:notes xmlns:a="http://schemas.openxmlformats.org/drawingml/2006/main" xmlns:p="http://schemas.openxmlformats.org/presentationml/2006/main" xmlns:r="http://schemas.openxmlformats.org/officeDocument/2006/relationships">
+  <p:cSld>
+    <p:spTree>
+      <p:nvGrpSpPr>
+        <p:cNvPr id="1" name=""/>
+        <p:cNvGrpSpPr/>
+        <p:nvPr/>
+      </p:nvGrpSpPr>
+      <p:grpSpPr>
+        <a:xfrm>
+          <a:off x="0" y="0"/>
+          <a:ext cx="0" cy="0"/>
+          <a:chOff x="0" y="0"/>
+          <a:chExt cx="0" cy="0"/>
+        </a:xfrm>
+      </p:grpSpPr>
+      <p:sp>
+        <p:nvSpPr>
+          <p:cNvPr id="2" name="Slide Image Placeholder 1"/>
+          <p:cNvSpPr>
+            <a:spLocks noGrp="1"/>
+          </p:cNvSpPr>
+          <p:nvPr>
+            <p:ph type="sldImg" idx="2"/>
+          </p:nvPr>
+        </p:nvSpPr>
+        <p:spPr/>
+      </p:sp>
+      <p:sp>
+        <p:nvSpPr>
+          <p:cNvPr id="3" name="Notes Placeholder 2"/>
+          <p:cNvSpPr>
+            <a:spLocks noGrp="1"/>
+          </p:cNvSpPr>
+          <p:nvPr>
+            <p:ph type="body" idx="3" sz="quarter"/>
+          </p:nvPr>
+        </p:nvSpPr>
+        <p:spPr/>
+        <p:txBody>
+          <a:bodyPr/>
+          <a:lstStyle/>
+          <a:p>
+            <a:r>
+              <a:t>Common traps: assuming snap alone legalizes; forgetting site width when checking overlap; ignoring fixed macro D at (8, 4); reporting HPWL without legality; and comparing Abacus and Tetris without naming displacement versus wirelength tradeoffs.</a:t>
+            </a:r>
+          </a:p>
+        </p:txBody>
+      </p:sp>
+      <p:sp>
+        <p:nvSpPr>
+          <p:cNvPr id="4" name="Slide Number Placeholder 3"/>
+          <p:cNvSpPr>
+            <a:spLocks noGrp="1"/>
+          </p:cNvSpPr>
+          <p:nvPr>
+            <p:ph type="sldNum" idx="5" sz="quarter"/>
+          </p:nvPr>
+        </p:nvSpPr>
+        <p:spPr/>
+      </p:sp>
+    </p:spTree>
+  </p:cSld>
+  <p:clrMapOvr>
+    <a:masterClrMapping/>
+  </p:clrMapOvr>
+</p:notes>
+</file>
+
+<file path=ppt/notesSlides/notesSlide13.xml><?xml version="1.0" encoding="utf-8"?>
+<p:notes xmlns:a="http://schemas.openxmlformats.org/drawingml/2006/main" xmlns:p="http://schemas.openxmlformats.org/presentationml/2006/main" xmlns:r="http://schemas.openxmlformats.org/officeDocument/2006/relationships">
+  <p:cSld>
+    <p:spTree>
+      <p:nvGrpSpPr>
+        <p:cNvPr id="1" name=""/>
+        <p:cNvGrpSpPr/>
+        <p:nvPr/>
+      </p:nvGrpSpPr>
+      <p:grpSpPr>
+        <a:xfrm>
+          <a:off x="0" y="0"/>
+          <a:ext cx="0" cy="0"/>
+          <a:chOff x="0" y="0"/>
+          <a:chExt cx="0" cy="0"/>
+        </a:xfrm>
+      </p:grpSpPr>
+      <p:sp>
+        <p:nvSpPr>
+          <p:cNvPr id="2" name="Slide Image Placeholder 1"/>
+          <p:cNvSpPr>
+            <a:spLocks noGrp="1"/>
+          </p:cNvSpPr>
+          <p:nvPr>
+            <p:ph type="sldImg" idx="2"/>
+          </p:nvPr>
+        </p:nvSpPr>
+        <p:spPr/>
+      </p:sp>
+      <p:sp>
+        <p:nvSpPr>
+          <p:cNvPr id="3" name="Notes Placeholder 2"/>
+          <p:cNvSpPr>
+            <a:spLocks noGrp="1"/>
+          </p:cNvSpPr>
+          <p:nvPr>
+            <p:ph type="body" idx="3" sz="quarter"/>
+          </p:nvPr>
+        </p:nvSpPr>
+        <p:spPr/>
+        <p:txBody>
+          <a:bodyPr/>
+          <a:lstStyle/>
+          <a:p>
+            <a:r>
               <a:t>Complete the checklist for at least one track—preferably both. Implement until your metrics match the starter goldens. When you're ready, take the short quiz, then continue to the next module.</a:t>
             </a:r>
           </a:p>
@@ -725,12 +868,6 @@
               <a:t>Check on-row placement, site alignment, in-chip bounds, and pairwise overlap. Report displacement as L1 Manhattan distance from the origin layout—Abacus moves four total units on this instance, overlap removal moves six. Pair legality with HPWL after legalize.</a:t>
             </a:r>
           </a:p>
-          <a:p/>
-          <a:p>
-            <a:r>
-              <a:t>&lt;!-- algorithm-walkthrough --&gt;</a:t>
-            </a:r>
-          </a:p>
         </p:txBody>
       </p:sp>
       <p:sp>
@@ -798,7 +935,13 @@
           <a:lstStyle/>
           <a:p>
             <a:r>
-              <a:t>Starting from the overlap placement, the checker reports overlap A/B first—three cells share the middle row at x equals four. That single reason is enough to fail legality.</a:t>
+              <a:t>Before you trust wirelength, write a legality checker in pseudocode. Inputs are coordinates and widths. The loop walks cells and pairs. The stop condition is the first failure reason—or ok when every check passes.</a:t>
+            </a:r>
+          </a:p>
+          <a:p/>
+          <a:p>
+            <a:r>
+              <a:t>Open this module's examples file and find the Pseudocode section. That written sketch is what you implement on the implement track and what the browser challenges measure.</a:t>
             </a:r>
           </a:p>
         </p:txBody>
@@ -868,7 +1011,7 @@
           <a:lstStyle/>
           <a:p>
             <a:r>
-              <a:t>A legal placement must be on-row, site-aligned, inside the chip, and overlap-free. Fixed macros add a fifth check later—did the macro move off its lock?</a:t>
+              <a:t>The sketch also defines the metrics you report after a legalize pass: L1 displacement from the origin layout, and HPWL from cell centers. On the overlap seed the checker fails with overlap A/B; the golden packing returns ok.</a:t>
             </a:r>
           </a:p>
         </p:txBody>
@@ -938,7 +1081,7 @@
           <a:lstStyle/>
           <a:p>
             <a:r>
-              <a:t>The golden reference satisfies every check: reason ok, legal true. Use it as the positive control when you unit-test your legality reporter.</a:t>
+              <a:t>Starting from the overlap placement, the checker reports overlap A/B first—three cells share the middle row at x equals four. That single reason is enough to fail legality.</a:t>
             </a:r>
           </a:p>
         </p:txBody>
@@ -1008,7 +1151,7 @@
           <a:lstStyle/>
           <a:p>
             <a:r>
-              <a:t>Displacement sums Manhattan distance per cell from a reference layout—here the overlap seed. Abacus later moves cells only four total units; overlap removal moves six.</a:t>
+              <a:t>A legal placement must be on-row, site-aligned, inside the chip, and overlap-free. Fixed macros add a fifth check later—did the macro move off its lock?</a:t>
             </a:r>
           </a:p>
         </p:txBody>
@@ -1078,13 +1221,7 @@
           <a:lstStyle/>
           <a:p>
             <a:r>
-              <a:t>Wirelength still matters: Abacus lands at HPWL thirty-eight with displacement four; Tetris-style packing hits HPWL thirty-two with displacement six. Always pair legality with both metrics.</a:t>
-            </a:r>
-          </a:p>
-          <a:p/>
-          <a:p>
-            <a:r>
-              <a:t>&lt;!-- /algorithm-walkthrough --&gt;</a:t>
+              <a:t>The golden reference satisfies every check: reason ok, legal true. Use it as the positive control when you unit-test your legality reporter.</a:t>
             </a:r>
           </a:p>
         </p:txBody>
@@ -1154,7 +1291,7 @@
           <a:lstStyle/>
           <a:p>
             <a:r>
-              <a:t>In the browser lab track, open the **legality-metrics** lab from the tools shelf. Load the overlap or float starter, run the legalizer once, and read legality plus displacement and HPWL when the panel shows them. Work the challenges that lock the goldens, then come back to implement the same loop yourself.</a:t>
+              <a:t>Displacement sums Manhattan distance per cell from a reference layout—here the overlap seed. Abacus later moves cells only four total units; overlap removal moves six.</a:t>
             </a:r>
           </a:p>
         </p:txBody>
@@ -1224,7 +1361,7 @@
           <a:lstStyle/>
           <a:p>
             <a:r>
-              <a:t>In the implement track, open this module's examples and the course `common/` solvers. Parse `tiny_legal.json`, run the algorithm with deterministic coordinates, and print legality, displacement, and HPWL. Match the browser goldens before you claim the checklist.</a:t>
+              <a:t>Wirelength still matters: Abacus lands at HPWL thirty-eight with displacement four; Tetris-style packing hits HPWL thirty-two with displacement six. Always pair legality with both metrics.</a:t>
             </a:r>
           </a:p>
         </p:txBody>
@@ -4382,21 +4519,45 @@
                 </a:solidFill>
                 <a:latin typeface="Calibri"/>
               </a:rPr>
-              <a:t>Pitfalls</a:t>
-            </a:r>
-          </a:p>
-        </p:txBody>
-      </p:sp>
-      <p:sp>
-        <p:nvSpPr>
-          <p:cNvPr id="3" name="TextBox 2"/>
+              <a:t>HPWL after legalize</a:t>
+            </a:r>
+          </a:p>
+        </p:txBody>
+      </p:sp>
+      <p:pic>
+        <p:nvPicPr>
+          <p:cNvPr id="3" name="Picture 2" descr="05-hpwl-after.png"/>
+          <p:cNvPicPr>
+            <a:picLocks noChangeAspect="1"/>
+          </p:cNvPicPr>
+          <p:nvPr/>
+        </p:nvPicPr>
+        <p:blipFill>
+          <a:blip r:embed="rId2"/>
+          <a:stretch>
+            <a:fillRect/>
+          </a:stretch>
+        </p:blipFill>
+        <p:spPr>
+          <a:xfrm>
+            <a:off x="548640" y="1143000"/>
+            <a:ext cx="9222489" cy="4572000"/>
+          </a:xfrm>
+          <a:prstGeom prst="rect">
+            <a:avLst/>
+          </a:prstGeom>
+        </p:spPr>
+      </p:pic>
+      <p:sp>
+        <p:nvSpPr>
+          <p:cNvPr id="4" name="TextBox 3"/>
           <p:cNvSpPr txBox="1"/>
           <p:nvPr/>
         </p:nvSpPr>
         <p:spPr>
           <a:xfrm>
-            <a:off x="548640" y="1234440"/>
-            <a:ext cx="11064240" cy="4937760"/>
+            <a:off x="548640" y="5897880"/>
+            <a:ext cx="11064240" cy="411480"/>
           </a:xfrm>
           <a:prstGeom prst="rect">
             <a:avLst/>
@@ -4409,32 +4570,26 @@
           </a:bodyPr>
           <a:lstStyle/>
           <a:p>
-            <a:pPr lvl="0" marL="457200" indent="-228600">
-              <a:buFont typeface="Calibri"/>
-              <a:spcAft>
-                <a:spcPts val="1000"/>
-              </a:spcAft>
-              <a:buSzPct val="100000"/>
-              <a:buChar char="•"/>
+            <a:pPr>
               <a:lnSpc>
                 <a:spcPts val="2200"/>
               </a:lnSpc>
             </a:pPr>
             <a:r>
-              <a:rPr sz="2000" b="0">
+              <a:rPr sz="1200" b="0">
                 <a:solidFill>
                   <a:srgbClr val="333333"/>
                 </a:solidFill>
                 <a:latin typeface="Calibri"/>
               </a:rPr>
-              <a:t>Common traps</a:t>
-            </a:r>
-          </a:p>
-        </p:txBody>
-      </p:sp>
-      <p:sp>
-        <p:nvSpPr>
-          <p:cNvPr id="4" name="TextBox 3"/>
+              <a:t>HPWL after legalize</a:t>
+            </a:r>
+          </a:p>
+        </p:txBody>
+      </p:sp>
+      <p:sp>
+        <p:nvSpPr>
+          <p:cNvPr id="5" name="TextBox 4"/>
           <p:cNvSpPr txBox="1"/>
           <p:nvPr/>
         </p:nvSpPr>
@@ -4523,6 +4678,557 @@
                 </a:solidFill>
                 <a:latin typeface="Calibri"/>
               </a:rPr>
+              <a:t>Browser lab track</a:t>
+            </a:r>
+          </a:p>
+        </p:txBody>
+      </p:sp>
+      <p:sp>
+        <p:nvSpPr>
+          <p:cNvPr id="3" name="TextBox 2"/>
+          <p:cNvSpPr txBox="1"/>
+          <p:nvPr/>
+        </p:nvSpPr>
+        <p:spPr>
+          <a:xfrm>
+            <a:off x="548640" y="1234440"/>
+            <a:ext cx="11064240" cy="4937760"/>
+          </a:xfrm>
+          <a:prstGeom prst="rect">
+            <a:avLst/>
+          </a:prstGeom>
+          <a:noFill/>
+        </p:spPr>
+        <p:txBody>
+          <a:bodyPr wrap="square">
+            <a:noAutofit/>
+          </a:bodyPr>
+          <a:lstStyle/>
+          <a:p>
+            <a:pPr lvl="0" marL="457200" indent="-228600">
+              <a:buFont typeface="Calibri"/>
+              <a:spcAft>
+                <a:spcPts val="1000"/>
+              </a:spcAft>
+              <a:buSzPct val="100000"/>
+              <a:buChar char="•"/>
+              <a:lnSpc>
+                <a:spcPts val="2200"/>
+              </a:lnSpc>
+            </a:pPr>
+            <a:r>
+              <a:rPr sz="2000" b="0">
+                <a:solidFill>
+                  <a:srgbClr val="333333"/>
+                </a:solidFill>
+                <a:latin typeface="Calibri"/>
+              </a:rPr>
+              <a:t>In the browser lab track, open the </a:t>
+            </a:r>
+            <a:r>
+              <a:rPr sz="2000" b="1">
+                <a:solidFill>
+                  <a:srgbClr val="333333"/>
+                </a:solidFill>
+                <a:latin typeface="Calibri"/>
+              </a:rPr>
+              <a:t>legality-metrics</a:t>
+            </a:r>
+            <a:r>
+              <a:rPr sz="2000" b="0">
+                <a:solidFill>
+                  <a:srgbClr val="333333"/>
+                </a:solidFill>
+                <a:latin typeface="Calibri"/>
+              </a:rPr>
+              <a:t> lab from the tools shelf</a:t>
+            </a:r>
+          </a:p>
+          <a:p>
+            <a:pPr lvl="0" marL="457200" indent="-228600">
+              <a:buFont typeface="Calibri"/>
+              <a:spcAft>
+                <a:spcPts val="1000"/>
+              </a:spcAft>
+              <a:buSzPct val="100000"/>
+              <a:buChar char="•"/>
+              <a:lnSpc>
+                <a:spcPts val="2200"/>
+              </a:lnSpc>
+            </a:pPr>
+            <a:r>
+              <a:rPr sz="2000" b="0">
+                <a:solidFill>
+                  <a:srgbClr val="333333"/>
+                </a:solidFill>
+                <a:latin typeface="Calibri"/>
+              </a:rPr>
+              <a:t>Open the interactive lab</a:t>
+            </a:r>
+          </a:p>
+          <a:p>
+            <a:pPr lvl="0" marL="457200" indent="-228600">
+              <a:buFont typeface="Calibri"/>
+              <a:spcAft>
+                <a:spcPts val="1000"/>
+              </a:spcAft>
+              <a:buSzPct val="100000"/>
+              <a:buChar char="•"/>
+              <a:lnSpc>
+                <a:spcPts val="2200"/>
+              </a:lnSpc>
+            </a:pPr>
+            <a:r>
+              <a:rPr sz="2000" b="0">
+                <a:solidFill>
+                  <a:srgbClr val="333333"/>
+                </a:solidFill>
+                <a:latin typeface="Calibri"/>
+              </a:rPr>
+              <a:t>Reveal golden is study-only</a:t>
+            </a:r>
+          </a:p>
+          <a:p>
+            <a:pPr lvl="0" marL="457200" indent="-228600">
+              <a:buFont typeface="Calibri"/>
+              <a:spcAft>
+                <a:spcPts val="1000"/>
+              </a:spcAft>
+              <a:buSzPct val="100000"/>
+              <a:buChar char="•"/>
+              <a:lnSpc>
+                <a:spcPts val="2200"/>
+              </a:lnSpc>
+            </a:pPr>
+            <a:r>
+              <a:rPr sz="2000" b="0">
+                <a:solidFill>
+                  <a:srgbClr val="333333"/>
+                </a:solidFill>
+                <a:latin typeface="Calibri"/>
+              </a:rPr>
+              <a:t>Work the challenges that lock the goldens</a:t>
+            </a:r>
+          </a:p>
+        </p:txBody>
+      </p:sp>
+      <p:sp>
+        <p:nvSpPr>
+          <p:cNvPr id="4" name="TextBox 3"/>
+          <p:cNvSpPr txBox="1"/>
+          <p:nvPr/>
+        </p:nvSpPr>
+        <p:spPr>
+          <a:xfrm>
+            <a:off x="548640" y="6355080"/>
+            <a:ext cx="11064240" cy="320040"/>
+          </a:xfrm>
+          <a:prstGeom prst="rect">
+            <a:avLst/>
+          </a:prstGeom>
+          <a:noFill/>
+        </p:spPr>
+        <p:txBody>
+          <a:bodyPr wrap="square">
+            <a:noAutofit/>
+          </a:bodyPr>
+          <a:lstStyle/>
+          <a:p>
+            <a:pPr algn="r">
+              <a:lnSpc>
+                <a:spcPts val="2200"/>
+              </a:lnSpc>
+              <a:defRPr sz="1000" b="0">
+                <a:solidFill>
+                  <a:srgbClr val="666666"/>
+                </a:solidFill>
+                <a:latin typeface="Calibri"/>
+              </a:defRPr>
+            </a:pPr>
+            <a:r>
+              <a:t>learn_legalization — 03 legality metrics</a:t>
+            </a:r>
+          </a:p>
+        </p:txBody>
+      </p:sp>
+    </p:spTree>
+  </p:cSld>
+  <p:clrMapOvr>
+    <a:masterClrMapping/>
+  </p:clrMapOvr>
+</p:sld>
+</file>
+
+<file path=ppt/slides/slide12.xml><?xml version="1.0" encoding="utf-8"?>
+<p:sld xmlns:a="http://schemas.openxmlformats.org/drawingml/2006/main" xmlns:p="http://schemas.openxmlformats.org/presentationml/2006/main" xmlns:r="http://schemas.openxmlformats.org/officeDocument/2006/relationships">
+  <p:cSld>
+    <p:spTree>
+      <p:nvGrpSpPr>
+        <p:cNvPr id="1" name=""/>
+        <p:cNvGrpSpPr/>
+        <p:nvPr/>
+      </p:nvGrpSpPr>
+      <p:grpSpPr/>
+      <p:sp>
+        <p:nvSpPr>
+          <p:cNvPr id="2" name="TextBox 1"/>
+          <p:cNvSpPr txBox="1"/>
+          <p:nvPr/>
+        </p:nvSpPr>
+        <p:spPr>
+          <a:xfrm>
+            <a:off x="548640" y="411480"/>
+            <a:ext cx="11064240" cy="777240"/>
+          </a:xfrm>
+          <a:prstGeom prst="rect">
+            <a:avLst/>
+          </a:prstGeom>
+          <a:noFill/>
+        </p:spPr>
+        <p:txBody>
+          <a:bodyPr wrap="square">
+            <a:noAutofit/>
+          </a:bodyPr>
+          <a:lstStyle/>
+          <a:p>
+            <a:pPr>
+              <a:lnSpc>
+                <a:spcPts val="2200"/>
+              </a:lnSpc>
+            </a:pPr>
+            <a:r>
+              <a:rPr sz="2800" b="1">
+                <a:solidFill>
+                  <a:srgbClr val="1A1A2E"/>
+                </a:solidFill>
+                <a:latin typeface="Calibri"/>
+              </a:rPr>
+              <a:t>Implement track</a:t>
+            </a:r>
+          </a:p>
+        </p:txBody>
+      </p:sp>
+      <p:sp>
+        <p:nvSpPr>
+          <p:cNvPr id="3" name="TextBox 2"/>
+          <p:cNvSpPr txBox="1"/>
+          <p:nvPr/>
+        </p:nvSpPr>
+        <p:spPr>
+          <a:xfrm>
+            <a:off x="548640" y="1234440"/>
+            <a:ext cx="11064240" cy="4937760"/>
+          </a:xfrm>
+          <a:prstGeom prst="rect">
+            <a:avLst/>
+          </a:prstGeom>
+          <a:noFill/>
+        </p:spPr>
+        <p:txBody>
+          <a:bodyPr wrap="square">
+            <a:noAutofit/>
+          </a:bodyPr>
+          <a:lstStyle/>
+          <a:p>
+            <a:pPr lvl="0" marL="457200" indent="-228600">
+              <a:buFont typeface="Calibri"/>
+              <a:spcAft>
+                <a:spcPts val="1000"/>
+              </a:spcAft>
+              <a:buSzPct val="100000"/>
+              <a:buChar char="•"/>
+              <a:lnSpc>
+                <a:spcPts val="2200"/>
+              </a:lnSpc>
+            </a:pPr>
+            <a:r>
+              <a:rPr sz="2000" b="0">
+                <a:solidFill>
+                  <a:srgbClr val="333333"/>
+                </a:solidFill>
+                <a:latin typeface="Calibri"/>
+              </a:rPr>
+              <a:t>In the implement track</a:t>
+            </a:r>
+          </a:p>
+          <a:p>
+            <a:pPr lvl="0" marL="457200" indent="-228600">
+              <a:buFont typeface="Calibri"/>
+              <a:spcAft>
+                <a:spcPts val="1000"/>
+              </a:spcAft>
+              <a:buSzPct val="100000"/>
+              <a:buChar char="•"/>
+              <a:lnSpc>
+                <a:spcPts val="2200"/>
+              </a:lnSpc>
+            </a:pPr>
+            <a:r>
+              <a:rPr sz="2000" b="0">
+                <a:solidFill>
+                  <a:srgbClr val="333333"/>
+                </a:solidFill>
+                <a:latin typeface="Calibri"/>
+              </a:rPr>
+              <a:t>Parse `tiny_legal.json`, run the algorithm with deterministic coordinates</a:t>
+            </a:r>
+          </a:p>
+          <a:p>
+            <a:pPr lvl="0" marL="457200" indent="-228600">
+              <a:buFont typeface="Calibri"/>
+              <a:spcAft>
+                <a:spcPts val="1000"/>
+              </a:spcAft>
+              <a:buSzPct val="100000"/>
+              <a:buChar char="•"/>
+              <a:lnSpc>
+                <a:spcPts val="2200"/>
+              </a:lnSpc>
+            </a:pPr>
+            <a:r>
+              <a:rPr sz="2000" b="0">
+                <a:solidFill>
+                  <a:srgbClr val="333333"/>
+                </a:solidFill>
+                <a:latin typeface="Calibri"/>
+              </a:rPr>
+              <a:t>Match the browser goldens before you claim the checklist</a:t>
+            </a:r>
+          </a:p>
+        </p:txBody>
+      </p:sp>
+      <p:sp>
+        <p:nvSpPr>
+          <p:cNvPr id="4" name="TextBox 3"/>
+          <p:cNvSpPr txBox="1"/>
+          <p:nvPr/>
+        </p:nvSpPr>
+        <p:spPr>
+          <a:xfrm>
+            <a:off x="548640" y="6355080"/>
+            <a:ext cx="11064240" cy="320040"/>
+          </a:xfrm>
+          <a:prstGeom prst="rect">
+            <a:avLst/>
+          </a:prstGeom>
+          <a:noFill/>
+        </p:spPr>
+        <p:txBody>
+          <a:bodyPr wrap="square">
+            <a:noAutofit/>
+          </a:bodyPr>
+          <a:lstStyle/>
+          <a:p>
+            <a:pPr algn="r">
+              <a:lnSpc>
+                <a:spcPts val="2200"/>
+              </a:lnSpc>
+              <a:defRPr sz="1000" b="0">
+                <a:solidFill>
+                  <a:srgbClr val="666666"/>
+                </a:solidFill>
+                <a:latin typeface="Calibri"/>
+              </a:defRPr>
+            </a:pPr>
+            <a:r>
+              <a:t>learn_legalization — 03 legality metrics</a:t>
+            </a:r>
+          </a:p>
+        </p:txBody>
+      </p:sp>
+    </p:spTree>
+  </p:cSld>
+  <p:clrMapOvr>
+    <a:masterClrMapping/>
+  </p:clrMapOvr>
+</p:sld>
+</file>
+
+<file path=ppt/slides/slide13.xml><?xml version="1.0" encoding="utf-8"?>
+<p:sld xmlns:a="http://schemas.openxmlformats.org/drawingml/2006/main" xmlns:p="http://schemas.openxmlformats.org/presentationml/2006/main" xmlns:r="http://schemas.openxmlformats.org/officeDocument/2006/relationships">
+  <p:cSld>
+    <p:spTree>
+      <p:nvGrpSpPr>
+        <p:cNvPr id="1" name=""/>
+        <p:cNvGrpSpPr/>
+        <p:nvPr/>
+      </p:nvGrpSpPr>
+      <p:grpSpPr/>
+      <p:sp>
+        <p:nvSpPr>
+          <p:cNvPr id="2" name="TextBox 1"/>
+          <p:cNvSpPr txBox="1"/>
+          <p:nvPr/>
+        </p:nvSpPr>
+        <p:spPr>
+          <a:xfrm>
+            <a:off x="548640" y="411480"/>
+            <a:ext cx="11064240" cy="777240"/>
+          </a:xfrm>
+          <a:prstGeom prst="rect">
+            <a:avLst/>
+          </a:prstGeom>
+          <a:noFill/>
+        </p:spPr>
+        <p:txBody>
+          <a:bodyPr wrap="square">
+            <a:noAutofit/>
+          </a:bodyPr>
+          <a:lstStyle/>
+          <a:p>
+            <a:pPr>
+              <a:lnSpc>
+                <a:spcPts val="2200"/>
+              </a:lnSpc>
+            </a:pPr>
+            <a:r>
+              <a:rPr sz="2800" b="1">
+                <a:solidFill>
+                  <a:srgbClr val="1A1A2E"/>
+                </a:solidFill>
+                <a:latin typeface="Calibri"/>
+              </a:rPr>
+              <a:t>Pitfalls</a:t>
+            </a:r>
+          </a:p>
+        </p:txBody>
+      </p:sp>
+      <p:sp>
+        <p:nvSpPr>
+          <p:cNvPr id="3" name="TextBox 2"/>
+          <p:cNvSpPr txBox="1"/>
+          <p:nvPr/>
+        </p:nvSpPr>
+        <p:spPr>
+          <a:xfrm>
+            <a:off x="548640" y="1234440"/>
+            <a:ext cx="11064240" cy="4937760"/>
+          </a:xfrm>
+          <a:prstGeom prst="rect">
+            <a:avLst/>
+          </a:prstGeom>
+          <a:noFill/>
+        </p:spPr>
+        <p:txBody>
+          <a:bodyPr wrap="square">
+            <a:noAutofit/>
+          </a:bodyPr>
+          <a:lstStyle/>
+          <a:p>
+            <a:pPr lvl="0" marL="457200" indent="-228600">
+              <a:buFont typeface="Calibri"/>
+              <a:spcAft>
+                <a:spcPts val="1000"/>
+              </a:spcAft>
+              <a:buSzPct val="100000"/>
+              <a:buChar char="•"/>
+              <a:lnSpc>
+                <a:spcPts val="2200"/>
+              </a:lnSpc>
+            </a:pPr>
+            <a:r>
+              <a:rPr sz="2000" b="0">
+                <a:solidFill>
+                  <a:srgbClr val="333333"/>
+                </a:solidFill>
+                <a:latin typeface="Calibri"/>
+              </a:rPr>
+              <a:t>Common traps</a:t>
+            </a:r>
+          </a:p>
+        </p:txBody>
+      </p:sp>
+      <p:sp>
+        <p:nvSpPr>
+          <p:cNvPr id="4" name="TextBox 3"/>
+          <p:cNvSpPr txBox="1"/>
+          <p:nvPr/>
+        </p:nvSpPr>
+        <p:spPr>
+          <a:xfrm>
+            <a:off x="548640" y="6355080"/>
+            <a:ext cx="11064240" cy="320040"/>
+          </a:xfrm>
+          <a:prstGeom prst="rect">
+            <a:avLst/>
+          </a:prstGeom>
+          <a:noFill/>
+        </p:spPr>
+        <p:txBody>
+          <a:bodyPr wrap="square">
+            <a:noAutofit/>
+          </a:bodyPr>
+          <a:lstStyle/>
+          <a:p>
+            <a:pPr algn="r">
+              <a:lnSpc>
+                <a:spcPts val="2200"/>
+              </a:lnSpc>
+              <a:defRPr sz="1000" b="0">
+                <a:solidFill>
+                  <a:srgbClr val="666666"/>
+                </a:solidFill>
+                <a:latin typeface="Calibri"/>
+              </a:defRPr>
+            </a:pPr>
+            <a:r>
+              <a:t>learn_legalization — 03 legality metrics</a:t>
+            </a:r>
+          </a:p>
+        </p:txBody>
+      </p:sp>
+    </p:spTree>
+  </p:cSld>
+  <p:clrMapOvr>
+    <a:masterClrMapping/>
+  </p:clrMapOvr>
+</p:sld>
+</file>
+
+<file path=ppt/slides/slide14.xml><?xml version="1.0" encoding="utf-8"?>
+<p:sld xmlns:a="http://schemas.openxmlformats.org/drawingml/2006/main" xmlns:p="http://schemas.openxmlformats.org/presentationml/2006/main" xmlns:r="http://schemas.openxmlformats.org/officeDocument/2006/relationships">
+  <p:cSld>
+    <p:spTree>
+      <p:nvGrpSpPr>
+        <p:cNvPr id="1" name=""/>
+        <p:cNvGrpSpPr/>
+        <p:nvPr/>
+      </p:nvGrpSpPr>
+      <p:grpSpPr/>
+      <p:sp>
+        <p:nvSpPr>
+          <p:cNvPr id="2" name="TextBox 1"/>
+          <p:cNvSpPr txBox="1"/>
+          <p:nvPr/>
+        </p:nvSpPr>
+        <p:spPr>
+          <a:xfrm>
+            <a:off x="548640" y="411480"/>
+            <a:ext cx="11064240" cy="777240"/>
+          </a:xfrm>
+          <a:prstGeom prst="rect">
+            <a:avLst/>
+          </a:prstGeom>
+          <a:noFill/>
+        </p:spPr>
+        <p:txBody>
+          <a:bodyPr wrap="square">
+            <a:noAutofit/>
+          </a:bodyPr>
+          <a:lstStyle/>
+          <a:p>
+            <a:pPr>
+              <a:lnSpc>
+                <a:spcPts val="2200"/>
+              </a:lnSpc>
+            </a:pPr>
+            <a:r>
+              <a:rPr sz="2800" b="1">
+                <a:solidFill>
+                  <a:srgbClr val="1A1A2E"/>
+                </a:solidFill>
+                <a:latin typeface="Calibri"/>
+              </a:rPr>
               <a:t>Your turn</a:t>
             </a:r>
           </a:p>
@@ -4800,6 +5506,125 @@
               <a:t>Pair legality with HPWL after legalize</a:t>
             </a:r>
           </a:p>
+        </p:txBody>
+      </p:sp>
+      <p:sp>
+        <p:nvSpPr>
+          <p:cNvPr id="4" name="TextBox 3"/>
+          <p:cNvSpPr txBox="1"/>
+          <p:nvPr/>
+        </p:nvSpPr>
+        <p:spPr>
+          <a:xfrm>
+            <a:off x="548640" y="6355080"/>
+            <a:ext cx="11064240" cy="320040"/>
+          </a:xfrm>
+          <a:prstGeom prst="rect">
+            <a:avLst/>
+          </a:prstGeom>
+          <a:noFill/>
+        </p:spPr>
+        <p:txBody>
+          <a:bodyPr wrap="square">
+            <a:noAutofit/>
+          </a:bodyPr>
+          <a:lstStyle/>
+          <a:p>
+            <a:pPr algn="r">
+              <a:lnSpc>
+                <a:spcPts val="2200"/>
+              </a:lnSpc>
+              <a:defRPr sz="1000" b="0">
+                <a:solidFill>
+                  <a:srgbClr val="666666"/>
+                </a:solidFill>
+                <a:latin typeface="Calibri"/>
+              </a:defRPr>
+            </a:pPr>
+            <a:r>
+              <a:t>learn_legalization — 03 legality metrics</a:t>
+            </a:r>
+          </a:p>
+        </p:txBody>
+      </p:sp>
+    </p:spTree>
+  </p:cSld>
+  <p:clrMapOvr>
+    <a:masterClrMapping/>
+  </p:clrMapOvr>
+</p:sld>
+</file>
+
+<file path=ppt/slides/slide3.xml><?xml version="1.0" encoding="utf-8"?>
+<p:sld xmlns:a="http://schemas.openxmlformats.org/drawingml/2006/main" xmlns:p="http://schemas.openxmlformats.org/presentationml/2006/main" xmlns:r="http://schemas.openxmlformats.org/officeDocument/2006/relationships">
+  <p:cSld>
+    <p:spTree>
+      <p:nvGrpSpPr>
+        <p:cNvPr id="1" name=""/>
+        <p:cNvGrpSpPr/>
+        <p:nvPr/>
+      </p:nvGrpSpPr>
+      <p:grpSpPr/>
+      <p:sp>
+        <p:nvSpPr>
+          <p:cNvPr id="2" name="TextBox 1"/>
+          <p:cNvSpPr txBox="1"/>
+          <p:nvPr/>
+        </p:nvSpPr>
+        <p:spPr>
+          <a:xfrm>
+            <a:off x="548640" y="411480"/>
+            <a:ext cx="11064240" cy="777240"/>
+          </a:xfrm>
+          <a:prstGeom prst="rect">
+            <a:avLst/>
+          </a:prstGeom>
+          <a:noFill/>
+        </p:spPr>
+        <p:txBody>
+          <a:bodyPr wrap="square">
+            <a:noAutofit/>
+          </a:bodyPr>
+          <a:lstStyle/>
+          <a:p>
+            <a:pPr>
+              <a:lnSpc>
+                <a:spcPts val="2200"/>
+              </a:lnSpc>
+            </a:pPr>
+            <a:r>
+              <a:rPr sz="2800" b="1">
+                <a:solidFill>
+                  <a:srgbClr val="1A1A2E"/>
+                </a:solidFill>
+                <a:latin typeface="Calibri"/>
+              </a:rPr>
+              <a:t>Pseudocode</a:t>
+            </a:r>
+          </a:p>
+        </p:txBody>
+      </p:sp>
+      <p:sp>
+        <p:nvSpPr>
+          <p:cNvPr id="3" name="TextBox 2"/>
+          <p:cNvSpPr txBox="1"/>
+          <p:nvPr/>
+        </p:nvSpPr>
+        <p:spPr>
+          <a:xfrm>
+            <a:off x="548640" y="1234440"/>
+            <a:ext cx="11064240" cy="4937760"/>
+          </a:xfrm>
+          <a:prstGeom prst="rect">
+            <a:avLst/>
+          </a:prstGeom>
+          <a:noFill/>
+        </p:spPr>
+        <p:txBody>
+          <a:bodyPr wrap="square">
+            <a:noAutofit/>
+          </a:bodyPr>
+          <a:lstStyle/>
           <a:p>
             <a:pPr lvl="0" marL="457200" indent="-228600">
               <a:buFont typeface="Calibri"/>
@@ -4819,7 +5644,117 @@
                 </a:solidFill>
                 <a:latin typeface="Calibri"/>
               </a:rPr>
-              <a:t>&lt;!-- algorithm-walkthrough --&gt;</a:t>
+              <a:t>Before you trust wirelength, write a legality checker in pseudocode</a:t>
+            </a:r>
+          </a:p>
+          <a:p>
+            <a:pPr lvl="0" marL="457200" indent="-228600">
+              <a:buFont typeface="Calibri"/>
+              <a:spcAft>
+                <a:spcPts val="1000"/>
+              </a:spcAft>
+              <a:buSzPct val="100000"/>
+              <a:buChar char="•"/>
+              <a:lnSpc>
+                <a:spcPts val="2200"/>
+              </a:lnSpc>
+            </a:pPr>
+            <a:r>
+              <a:rPr sz="2000" b="0">
+                <a:solidFill>
+                  <a:srgbClr val="333333"/>
+                </a:solidFill>
+                <a:latin typeface="Calibri"/>
+              </a:rPr>
+              <a:t>Inputs are coordinates and widths</a:t>
+            </a:r>
+          </a:p>
+          <a:p>
+            <a:pPr lvl="0" marL="457200" indent="-228600">
+              <a:buFont typeface="Calibri"/>
+              <a:spcAft>
+                <a:spcPts val="1000"/>
+              </a:spcAft>
+              <a:buSzPct val="100000"/>
+              <a:buChar char="•"/>
+              <a:lnSpc>
+                <a:spcPts val="2200"/>
+              </a:lnSpc>
+            </a:pPr>
+            <a:r>
+              <a:rPr sz="2000" b="0">
+                <a:solidFill>
+                  <a:srgbClr val="333333"/>
+                </a:solidFill>
+                <a:latin typeface="Calibri"/>
+              </a:rPr>
+              <a:t>The loop walks cells and pairs</a:t>
+            </a:r>
+          </a:p>
+          <a:p>
+            <a:pPr lvl="0" marL="457200" indent="-228600">
+              <a:buFont typeface="Calibri"/>
+              <a:spcAft>
+                <a:spcPts val="1000"/>
+              </a:spcAft>
+              <a:buSzPct val="100000"/>
+              <a:buChar char="•"/>
+              <a:lnSpc>
+                <a:spcPts val="2200"/>
+              </a:lnSpc>
+            </a:pPr>
+            <a:r>
+              <a:rPr sz="2000" b="0">
+                <a:solidFill>
+                  <a:srgbClr val="333333"/>
+                </a:solidFill>
+                <a:latin typeface="Calibri"/>
+              </a:rPr>
+              <a:t>The stop condition is the first failure reason, or ok when every check passes</a:t>
+            </a:r>
+          </a:p>
+          <a:p>
+            <a:pPr lvl="0" marL="457200" indent="-228600">
+              <a:buFont typeface="Calibri"/>
+              <a:spcAft>
+                <a:spcPts val="1000"/>
+              </a:spcAft>
+              <a:buSzPct val="100000"/>
+              <a:buChar char="•"/>
+              <a:lnSpc>
+                <a:spcPts val="2200"/>
+              </a:lnSpc>
+            </a:pPr>
+            <a:r>
+              <a:rPr sz="2000" b="0">
+                <a:solidFill>
+                  <a:srgbClr val="333333"/>
+                </a:solidFill>
+                <a:latin typeface="Calibri"/>
+              </a:rPr>
+              <a:t>Open this module's examples file and find the Pseudocode section</a:t>
+            </a:r>
+          </a:p>
+          <a:p>
+            <a:pPr lvl="0" marL="457200" indent="-228600">
+              <a:buFont typeface="Calibri"/>
+              <a:spcAft>
+                <a:spcPts val="1000"/>
+              </a:spcAft>
+              <a:buSzPct val="100000"/>
+              <a:buChar char="•"/>
+              <a:lnSpc>
+                <a:spcPts val="2200"/>
+              </a:lnSpc>
+            </a:pPr>
+            <a:r>
+              <a:rPr sz="2000" b="0">
+                <a:solidFill>
+                  <a:srgbClr val="333333"/>
+                </a:solidFill>
+                <a:latin typeface="Calibri"/>
+              </a:rPr>
+              <a:t>That written sketch is what you implement on the implement track and what the browser</a:t>
             </a:r>
           </a:p>
         </p:txBody>
@@ -4871,7 +5806,443 @@
 </p:sld>
 </file>
 
-<file path=ppt/slides/slide3.xml><?xml version="1.0" encoding="utf-8"?>
+<file path=ppt/slides/slide4.xml><?xml version="1.0" encoding="utf-8"?>
+<p:sld xmlns:a="http://schemas.openxmlformats.org/drawingml/2006/main" xmlns:p="http://schemas.openxmlformats.org/presentationml/2006/main" xmlns:r="http://schemas.openxmlformats.org/officeDocument/2006/relationships">
+  <p:cSld>
+    <p:spTree>
+      <p:nvGrpSpPr>
+        <p:cNvPr id="1" name=""/>
+        <p:cNvGrpSpPr/>
+        <p:nvPr/>
+      </p:nvGrpSpPr>
+      <p:grpSpPr/>
+      <p:sp>
+        <p:nvSpPr>
+          <p:cNvPr id="2" name="TextBox 1"/>
+          <p:cNvSpPr txBox="1"/>
+          <p:nvPr/>
+        </p:nvSpPr>
+        <p:spPr>
+          <a:xfrm>
+            <a:off x="548640" y="411480"/>
+            <a:ext cx="11064240" cy="777240"/>
+          </a:xfrm>
+          <a:prstGeom prst="rect">
+            <a:avLst/>
+          </a:prstGeom>
+          <a:noFill/>
+        </p:spPr>
+        <p:txBody>
+          <a:bodyPr wrap="square">
+            <a:noAutofit/>
+          </a:bodyPr>
+          <a:lstStyle/>
+          <a:p>
+            <a:pPr>
+              <a:lnSpc>
+                <a:spcPts val="2200"/>
+              </a:lnSpc>
+            </a:pPr>
+            <a:r>
+              <a:rPr sz="2800" b="1">
+                <a:solidFill>
+                  <a:srgbClr val="1A1A2E"/>
+                </a:solidFill>
+                <a:latin typeface="Calibri"/>
+              </a:rPr>
+              <a:t>Algorithm sketch</a:t>
+            </a:r>
+          </a:p>
+        </p:txBody>
+      </p:sp>
+      <p:sp>
+        <p:nvSpPr>
+          <p:cNvPr id="3" name="TextBox 2"/>
+          <p:cNvSpPr txBox="1"/>
+          <p:nvPr/>
+        </p:nvSpPr>
+        <p:spPr>
+          <a:xfrm>
+            <a:off x="548640" y="1234440"/>
+            <a:ext cx="11064240" cy="4937760"/>
+          </a:xfrm>
+          <a:prstGeom prst="rect">
+            <a:avLst/>
+          </a:prstGeom>
+          <a:noFill/>
+        </p:spPr>
+        <p:txBody>
+          <a:bodyPr wrap="square">
+            <a:noAutofit/>
+          </a:bodyPr>
+          <a:lstStyle/>
+          <a:p>
+            <a:pPr lvl="0" marL="457200" indent="-228600">
+              <a:buFont typeface="Calibri"/>
+              <a:spcAft>
+                <a:spcPts val="1000"/>
+              </a:spcAft>
+              <a:buSzPct val="100000"/>
+              <a:buChar char="•"/>
+              <a:lnSpc>
+                <a:spcPts val="2200"/>
+              </a:lnSpc>
+            </a:pPr>
+            <a:r>
+              <a:rPr sz="2000" b="0">
+                <a:solidFill>
+                  <a:srgbClr val="333333"/>
+                </a:solidFill>
+                <a:latin typeface="Calibri"/>
+              </a:rPr>
+              <a:t>The sketch also defines the metrics you report after a legalize pass</a:t>
+            </a:r>
+          </a:p>
+          <a:p>
+            <a:pPr lvl="0" marL="457200" indent="-228600">
+              <a:buFont typeface="Calibri"/>
+              <a:spcAft>
+                <a:spcPts val="1000"/>
+              </a:spcAft>
+              <a:buSzPct val="100000"/>
+              <a:buChar char="•"/>
+              <a:lnSpc>
+                <a:spcPts val="2200"/>
+              </a:lnSpc>
+            </a:pPr>
+            <a:r>
+              <a:rPr sz="2000" b="0">
+                <a:solidFill>
+                  <a:srgbClr val="333333"/>
+                </a:solidFill>
+                <a:latin typeface="Calibri"/>
+              </a:rPr>
+              <a:t>On the overlap seed the checker fails with overlap A/B; the golden packing returns ok</a:t>
+            </a:r>
+          </a:p>
+        </p:txBody>
+      </p:sp>
+      <p:sp>
+        <p:nvSpPr>
+          <p:cNvPr id="4" name="TextBox 3"/>
+          <p:cNvSpPr txBox="1"/>
+          <p:nvPr/>
+        </p:nvSpPr>
+        <p:spPr>
+          <a:xfrm>
+            <a:off x="548640" y="6355080"/>
+            <a:ext cx="11064240" cy="320040"/>
+          </a:xfrm>
+          <a:prstGeom prst="rect">
+            <a:avLst/>
+          </a:prstGeom>
+          <a:noFill/>
+        </p:spPr>
+        <p:txBody>
+          <a:bodyPr wrap="square">
+            <a:noAutofit/>
+          </a:bodyPr>
+          <a:lstStyle/>
+          <a:p>
+            <a:pPr algn="r">
+              <a:lnSpc>
+                <a:spcPts val="2200"/>
+              </a:lnSpc>
+              <a:defRPr sz="1000" b="0">
+                <a:solidFill>
+                  <a:srgbClr val="666666"/>
+                </a:solidFill>
+                <a:latin typeface="Calibri"/>
+              </a:defRPr>
+            </a:pPr>
+            <a:r>
+              <a:t>learn_legalization — 03 legality metrics</a:t>
+            </a:r>
+          </a:p>
+        </p:txBody>
+      </p:sp>
+    </p:spTree>
+  </p:cSld>
+  <p:clrMapOvr>
+    <a:masterClrMapping/>
+  </p:clrMapOvr>
+</p:sld>
+</file>
+
+<file path=ppt/slides/slide5.xml><?xml version="1.0" encoding="utf-8"?>
+<p:sld xmlns:a="http://schemas.openxmlformats.org/drawingml/2006/main" xmlns:p="http://schemas.openxmlformats.org/presentationml/2006/main" xmlns:r="http://schemas.openxmlformats.org/officeDocument/2006/relationships">
+  <p:cSld>
+    <p:spTree>
+      <p:nvGrpSpPr>
+        <p:cNvPr id="1" name=""/>
+        <p:cNvGrpSpPr/>
+        <p:nvPr/>
+      </p:nvGrpSpPr>
+      <p:grpSpPr/>
+      <p:sp>
+        <p:nvSpPr>
+          <p:cNvPr id="2" name="TextBox 1"/>
+          <p:cNvSpPr txBox="1"/>
+          <p:nvPr/>
+        </p:nvSpPr>
+        <p:spPr>
+          <a:xfrm>
+            <a:off x="548640" y="411480"/>
+            <a:ext cx="11064240" cy="777240"/>
+          </a:xfrm>
+          <a:prstGeom prst="rect">
+            <a:avLst/>
+          </a:prstGeom>
+          <a:noFill/>
+        </p:spPr>
+        <p:txBody>
+          <a:bodyPr wrap="square">
+            <a:noAutofit/>
+          </a:bodyPr>
+          <a:lstStyle/>
+          <a:p>
+            <a:pPr>
+              <a:lnSpc>
+                <a:spcPts val="2200"/>
+              </a:lnSpc>
+            </a:pPr>
+            <a:r>
+              <a:rPr sz="2800" b="1">
+                <a:solidFill>
+                  <a:srgbClr val="1A1A2E"/>
+                </a:solidFill>
+                <a:latin typeface="Calibri"/>
+              </a:rPr>
+              <a:t>Algorithm sketch — try these</a:t>
+            </a:r>
+          </a:p>
+        </p:txBody>
+      </p:sp>
+      <p:sp>
+        <p:nvSpPr>
+          <p:cNvPr id="3" name="TextBox 2"/>
+          <p:cNvSpPr txBox="1"/>
+          <p:nvPr/>
+        </p:nvSpPr>
+        <p:spPr>
+          <a:xfrm>
+            <a:off x="548640" y="1143000"/>
+            <a:ext cx="11064240" cy="5029200"/>
+          </a:xfrm>
+          <a:prstGeom prst="rect">
+            <a:avLst/>
+          </a:prstGeom>
+          <a:solidFill>
+            <a:srgbClr val="F4F4F4"/>
+          </a:solidFill>
+        </p:spPr>
+        <p:txBody>
+          <a:bodyPr wrap="square">
+            <a:noAutofit/>
+          </a:bodyPr>
+          <a:lstStyle/>
+          <a:p>
+            <a:pPr>
+              <a:lnSpc>
+                <a:spcPts val="2200"/>
+              </a:lnSpc>
+              <a:spcAft>
+                <a:spcPts val="400"/>
+              </a:spcAft>
+            </a:pPr>
+            <a:r>
+              <a:rPr sz="2000" b="0">
+                <a:solidFill>
+                  <a:srgbClr val="333333"/>
+                </a:solidFill>
+                <a:latin typeface="Consolas"/>
+              </a:rPr>
+              <a:t>INPUT: positions, widths, chip, optional fixed</a:t>
+            </a:r>
+          </a:p>
+          <a:p>
+            <a:pPr>
+              <a:lnSpc>
+                <a:spcPts val="2200"/>
+              </a:lnSpc>
+              <a:spcAft>
+                <a:spcPts val="400"/>
+              </a:spcAft>
+            </a:pPr>
+            <a:r>
+              <a:rPr sz="2000" b="0">
+                <a:solidFill>
+                  <a:srgbClr val="333333"/>
+                </a:solidFill>
+                <a:latin typeface="Consolas"/>
+              </a:rPr>
+              <a:t>OUTPUT: legal?, reason, disp, HPWL</a:t>
+            </a:r>
+          </a:p>
+          <a:p>
+            <a:pPr>
+              <a:lnSpc>
+                <a:spcPts val="2200"/>
+              </a:lnSpc>
+              <a:spcAft>
+                <a:spcPts val="400"/>
+              </a:spcAft>
+            </a:pPr>
+            <a:r>
+              <a:rPr sz="2000" b="0">
+                <a:solidFill>
+                  <a:srgbClr val="333333"/>
+                </a:solidFill>
+                <a:latin typeface="Consolas"/>
+              </a:rPr>
+              <a:t>for each cell c:</a:t>
+            </a:r>
+          </a:p>
+          <a:p>
+            <a:pPr>
+              <a:lnSpc>
+                <a:spcPts val="2200"/>
+              </a:lnSpc>
+              <a:spcAft>
+                <a:spcPts val="400"/>
+              </a:spcAft>
+            </a:pPr>
+            <a:r>
+              <a:rPr sz="2000" b="0">
+                <a:solidFill>
+                  <a:srgbClr val="333333"/>
+                </a:solidFill>
+                <a:latin typeface="Consolas"/>
+              </a:rPr>
+              <a:t>  fail if off-site, off-row, outside, or macro moved</a:t>
+            </a:r>
+          </a:p>
+          <a:p>
+            <a:pPr>
+              <a:lnSpc>
+                <a:spcPts val="2200"/>
+              </a:lnSpc>
+              <a:spcAft>
+                <a:spcPts val="400"/>
+              </a:spcAft>
+            </a:pPr>
+            <a:r>
+              <a:rPr sz="2000" b="0">
+                <a:solidFill>
+                  <a:srgbClr val="333333"/>
+                </a:solidFill>
+                <a:latin typeface="Consolas"/>
+              </a:rPr>
+              <a:t>for each same-row pair (a,b):</a:t>
+            </a:r>
+          </a:p>
+          <a:p>
+            <a:pPr>
+              <a:lnSpc>
+                <a:spcPts val="2200"/>
+              </a:lnSpc>
+              <a:spcAft>
+                <a:spcPts val="400"/>
+              </a:spcAft>
+            </a:pPr>
+            <a:r>
+              <a:rPr sz="2000" b="0">
+                <a:solidFill>
+                  <a:srgbClr val="333333"/>
+                </a:solidFill>
+                <a:latin typeface="Consolas"/>
+              </a:rPr>
+              <a:t>  fail if [x,x+w) intervals overlap</a:t>
+            </a:r>
+          </a:p>
+          <a:p>
+            <a:pPr>
+              <a:lnSpc>
+                <a:spcPts val="2200"/>
+              </a:lnSpc>
+              <a:spcAft>
+                <a:spcPts val="400"/>
+              </a:spcAft>
+            </a:pPr>
+            <a:r>
+              <a:rPr sz="2000" b="0">
+                <a:solidFill>
+                  <a:srgbClr val="333333"/>
+                </a:solidFill>
+                <a:latin typeface="Consolas"/>
+              </a:rPr>
+              <a:t>disp = Σ|Δx|+|Δy|; HPWL = Σ net bbox (centers)</a:t>
+            </a:r>
+          </a:p>
+          <a:p>
+            <a:pPr>
+              <a:lnSpc>
+                <a:spcPts val="2200"/>
+              </a:lnSpc>
+              <a:spcAft>
+                <a:spcPts val="400"/>
+              </a:spcAft>
+            </a:pPr>
+            <a:r>
+              <a:rPr sz="2000" b="0">
+                <a:solidFill>
+                  <a:srgbClr val="333333"/>
+                </a:solidFill>
+                <a:latin typeface="Consolas"/>
+              </a:rPr>
+              <a:t>GOLDEN: overlap → "overlap A/B"; golden → "ok"</a:t>
+            </a:r>
+          </a:p>
+        </p:txBody>
+      </p:sp>
+      <p:sp>
+        <p:nvSpPr>
+          <p:cNvPr id="4" name="TextBox 3"/>
+          <p:cNvSpPr txBox="1"/>
+          <p:nvPr/>
+        </p:nvSpPr>
+        <p:spPr>
+          <a:xfrm>
+            <a:off x="548640" y="6355080"/>
+            <a:ext cx="11064240" cy="320040"/>
+          </a:xfrm>
+          <a:prstGeom prst="rect">
+            <a:avLst/>
+          </a:prstGeom>
+          <a:noFill/>
+        </p:spPr>
+        <p:txBody>
+          <a:bodyPr wrap="square">
+            <a:noAutofit/>
+          </a:bodyPr>
+          <a:lstStyle/>
+          <a:p>
+            <a:pPr algn="r">
+              <a:lnSpc>
+                <a:spcPts val="2200"/>
+              </a:lnSpc>
+              <a:defRPr sz="1000" b="0">
+                <a:solidFill>
+                  <a:srgbClr val="666666"/>
+                </a:solidFill>
+                <a:latin typeface="Calibri"/>
+              </a:defRPr>
+            </a:pPr>
+            <a:r>
+              <a:t>learn_legalization — 03 legality metrics</a:t>
+            </a:r>
+          </a:p>
+        </p:txBody>
+      </p:sp>
+    </p:spTree>
+  </p:cSld>
+  <p:clrMapOvr>
+    <a:masterClrMapping/>
+  </p:clrMapOvr>
+</p:sld>
+</file>
+
+<file path=ppt/slides/slide6.xml><?xml version="1.0" encoding="utf-8"?>
 <p:sld xmlns:a="http://schemas.openxmlformats.org/drawingml/2006/main" xmlns:p="http://schemas.openxmlformats.org/presentationml/2006/main" xmlns:r="http://schemas.openxmlformats.org/officeDocument/2006/relationships">
   <p:cSld>
     <p:spTree>
@@ -5030,7 +6401,7 @@
 </p:sld>
 </file>
 
-<file path=ppt/slides/slide4.xml><?xml version="1.0" encoding="utf-8"?>
+<file path=ppt/slides/slide7.xml><?xml version="1.0" encoding="utf-8"?>
 <p:sld xmlns:a="http://schemas.openxmlformats.org/drawingml/2006/main" xmlns:p="http://schemas.openxmlformats.org/presentationml/2006/main" xmlns:r="http://schemas.openxmlformats.org/officeDocument/2006/relationships">
   <p:cSld>
     <p:spTree>
@@ -5189,7 +6560,7 @@
 </p:sld>
 </file>
 
-<file path=ppt/slides/slide5.xml><?xml version="1.0" encoding="utf-8"?>
+<file path=ppt/slides/slide8.xml><?xml version="1.0" encoding="utf-8"?>
 <p:sld xmlns:a="http://schemas.openxmlformats.org/drawingml/2006/main" xmlns:p="http://schemas.openxmlformats.org/presentationml/2006/main" xmlns:r="http://schemas.openxmlformats.org/officeDocument/2006/relationships">
   <p:cSld>
     <p:spTree>
@@ -5348,7 +6719,7 @@
 </p:sld>
 </file>
 
-<file path=ppt/slides/slide6.xml><?xml version="1.0" encoding="utf-8"?>
+<file path=ppt/slides/slide9.xml><?xml version="1.0" encoding="utf-8"?>
 <p:sld xmlns:a="http://schemas.openxmlformats.org/drawingml/2006/main" xmlns:p="http://schemas.openxmlformats.org/presentationml/2006/main" xmlns:r="http://schemas.openxmlformats.org/officeDocument/2006/relationships">
   <p:cSld>
     <p:spTree>
@@ -5463,553 +6834,6 @@
       <p:sp>
         <p:nvSpPr>
           <p:cNvPr id="5" name="TextBox 4"/>
-          <p:cNvSpPr txBox="1"/>
-          <p:nvPr/>
-        </p:nvSpPr>
-        <p:spPr>
-          <a:xfrm>
-            <a:off x="548640" y="6355080"/>
-            <a:ext cx="11064240" cy="320040"/>
-          </a:xfrm>
-          <a:prstGeom prst="rect">
-            <a:avLst/>
-          </a:prstGeom>
-          <a:noFill/>
-        </p:spPr>
-        <p:txBody>
-          <a:bodyPr wrap="square">
-            <a:noAutofit/>
-          </a:bodyPr>
-          <a:lstStyle/>
-          <a:p>
-            <a:pPr algn="r">
-              <a:lnSpc>
-                <a:spcPts val="2200"/>
-              </a:lnSpc>
-              <a:defRPr sz="1000" b="0">
-                <a:solidFill>
-                  <a:srgbClr val="666666"/>
-                </a:solidFill>
-                <a:latin typeface="Calibri"/>
-              </a:defRPr>
-            </a:pPr>
-            <a:r>
-              <a:t>learn_legalization — 03 legality metrics</a:t>
-            </a:r>
-          </a:p>
-        </p:txBody>
-      </p:sp>
-    </p:spTree>
-  </p:cSld>
-  <p:clrMapOvr>
-    <a:masterClrMapping/>
-  </p:clrMapOvr>
-</p:sld>
-</file>
-
-<file path=ppt/slides/slide7.xml><?xml version="1.0" encoding="utf-8"?>
-<p:sld xmlns:a="http://schemas.openxmlformats.org/drawingml/2006/main" xmlns:p="http://schemas.openxmlformats.org/presentationml/2006/main" xmlns:r="http://schemas.openxmlformats.org/officeDocument/2006/relationships">
-  <p:cSld>
-    <p:spTree>
-      <p:nvGrpSpPr>
-        <p:cNvPr id="1" name=""/>
-        <p:cNvGrpSpPr/>
-        <p:nvPr/>
-      </p:nvGrpSpPr>
-      <p:grpSpPr/>
-      <p:sp>
-        <p:nvSpPr>
-          <p:cNvPr id="2" name="TextBox 1"/>
-          <p:cNvSpPr txBox="1"/>
-          <p:nvPr/>
-        </p:nvSpPr>
-        <p:spPr>
-          <a:xfrm>
-            <a:off x="548640" y="411480"/>
-            <a:ext cx="11064240" cy="777240"/>
-          </a:xfrm>
-          <a:prstGeom prst="rect">
-            <a:avLst/>
-          </a:prstGeom>
-          <a:noFill/>
-        </p:spPr>
-        <p:txBody>
-          <a:bodyPr wrap="square">
-            <a:noAutofit/>
-          </a:bodyPr>
-          <a:lstStyle/>
-          <a:p>
-            <a:pPr>
-              <a:lnSpc>
-                <a:spcPts val="2200"/>
-              </a:lnSpc>
-            </a:pPr>
-            <a:r>
-              <a:rPr sz="2800" b="1">
-                <a:solidFill>
-                  <a:srgbClr val="1A1A2E"/>
-                </a:solidFill>
-                <a:latin typeface="Calibri"/>
-              </a:rPr>
-              <a:t>HPWL after legalize</a:t>
-            </a:r>
-          </a:p>
-        </p:txBody>
-      </p:sp>
-      <p:pic>
-        <p:nvPicPr>
-          <p:cNvPr id="3" name="Picture 2" descr="05-hpwl-after.png"/>
-          <p:cNvPicPr>
-            <a:picLocks noChangeAspect="1"/>
-          </p:cNvPicPr>
-          <p:nvPr/>
-        </p:nvPicPr>
-        <p:blipFill>
-          <a:blip r:embed="rId2"/>
-          <a:stretch>
-            <a:fillRect/>
-          </a:stretch>
-        </p:blipFill>
-        <p:spPr>
-          <a:xfrm>
-            <a:off x="548640" y="1143000"/>
-            <a:ext cx="9222489" cy="4572000"/>
-          </a:xfrm>
-          <a:prstGeom prst="rect">
-            <a:avLst/>
-          </a:prstGeom>
-        </p:spPr>
-      </p:pic>
-      <p:sp>
-        <p:nvSpPr>
-          <p:cNvPr id="4" name="TextBox 3"/>
-          <p:cNvSpPr txBox="1"/>
-          <p:nvPr/>
-        </p:nvSpPr>
-        <p:spPr>
-          <a:xfrm>
-            <a:off x="548640" y="5897880"/>
-            <a:ext cx="11064240" cy="411480"/>
-          </a:xfrm>
-          <a:prstGeom prst="rect">
-            <a:avLst/>
-          </a:prstGeom>
-          <a:noFill/>
-        </p:spPr>
-        <p:txBody>
-          <a:bodyPr wrap="square">
-            <a:noAutofit/>
-          </a:bodyPr>
-          <a:lstStyle/>
-          <a:p>
-            <a:pPr>
-              <a:lnSpc>
-                <a:spcPts val="2200"/>
-              </a:lnSpc>
-            </a:pPr>
-            <a:r>
-              <a:rPr sz="1200" b="0">
-                <a:solidFill>
-                  <a:srgbClr val="333333"/>
-                </a:solidFill>
-                <a:latin typeface="Calibri"/>
-              </a:rPr>
-              <a:t>HPWL after legalize</a:t>
-            </a:r>
-          </a:p>
-        </p:txBody>
-      </p:sp>
-      <p:sp>
-        <p:nvSpPr>
-          <p:cNvPr id="5" name="TextBox 4"/>
-          <p:cNvSpPr txBox="1"/>
-          <p:nvPr/>
-        </p:nvSpPr>
-        <p:spPr>
-          <a:xfrm>
-            <a:off x="548640" y="6355080"/>
-            <a:ext cx="11064240" cy="320040"/>
-          </a:xfrm>
-          <a:prstGeom prst="rect">
-            <a:avLst/>
-          </a:prstGeom>
-          <a:noFill/>
-        </p:spPr>
-        <p:txBody>
-          <a:bodyPr wrap="square">
-            <a:noAutofit/>
-          </a:bodyPr>
-          <a:lstStyle/>
-          <a:p>
-            <a:pPr algn="r">
-              <a:lnSpc>
-                <a:spcPts val="2200"/>
-              </a:lnSpc>
-              <a:defRPr sz="1000" b="0">
-                <a:solidFill>
-                  <a:srgbClr val="666666"/>
-                </a:solidFill>
-                <a:latin typeface="Calibri"/>
-              </a:defRPr>
-            </a:pPr>
-            <a:r>
-              <a:t>learn_legalization — 03 legality metrics</a:t>
-            </a:r>
-          </a:p>
-        </p:txBody>
-      </p:sp>
-    </p:spTree>
-  </p:cSld>
-  <p:clrMapOvr>
-    <a:masterClrMapping/>
-  </p:clrMapOvr>
-</p:sld>
-</file>
-
-<file path=ppt/slides/slide8.xml><?xml version="1.0" encoding="utf-8"?>
-<p:sld xmlns:a="http://schemas.openxmlformats.org/drawingml/2006/main" xmlns:p="http://schemas.openxmlformats.org/presentationml/2006/main" xmlns:r="http://schemas.openxmlformats.org/officeDocument/2006/relationships">
-  <p:cSld>
-    <p:spTree>
-      <p:nvGrpSpPr>
-        <p:cNvPr id="1" name=""/>
-        <p:cNvGrpSpPr/>
-        <p:nvPr/>
-      </p:nvGrpSpPr>
-      <p:grpSpPr/>
-      <p:sp>
-        <p:nvSpPr>
-          <p:cNvPr id="2" name="TextBox 1"/>
-          <p:cNvSpPr txBox="1"/>
-          <p:nvPr/>
-        </p:nvSpPr>
-        <p:spPr>
-          <a:xfrm>
-            <a:off x="548640" y="411480"/>
-            <a:ext cx="11064240" cy="777240"/>
-          </a:xfrm>
-          <a:prstGeom prst="rect">
-            <a:avLst/>
-          </a:prstGeom>
-          <a:noFill/>
-        </p:spPr>
-        <p:txBody>
-          <a:bodyPr wrap="square">
-            <a:noAutofit/>
-          </a:bodyPr>
-          <a:lstStyle/>
-          <a:p>
-            <a:pPr>
-              <a:lnSpc>
-                <a:spcPts val="2200"/>
-              </a:lnSpc>
-            </a:pPr>
-            <a:r>
-              <a:rPr sz="2800" b="1">
-                <a:solidFill>
-                  <a:srgbClr val="1A1A2E"/>
-                </a:solidFill>
-                <a:latin typeface="Calibri"/>
-              </a:rPr>
-              <a:t>Browser lab track</a:t>
-            </a:r>
-          </a:p>
-        </p:txBody>
-      </p:sp>
-      <p:sp>
-        <p:nvSpPr>
-          <p:cNvPr id="3" name="TextBox 2"/>
-          <p:cNvSpPr txBox="1"/>
-          <p:nvPr/>
-        </p:nvSpPr>
-        <p:spPr>
-          <a:xfrm>
-            <a:off x="548640" y="1234440"/>
-            <a:ext cx="11064240" cy="4937760"/>
-          </a:xfrm>
-          <a:prstGeom prst="rect">
-            <a:avLst/>
-          </a:prstGeom>
-          <a:noFill/>
-        </p:spPr>
-        <p:txBody>
-          <a:bodyPr wrap="square">
-            <a:noAutofit/>
-          </a:bodyPr>
-          <a:lstStyle/>
-          <a:p>
-            <a:pPr lvl="0" marL="457200" indent="-228600">
-              <a:buFont typeface="Calibri"/>
-              <a:spcAft>
-                <a:spcPts val="1000"/>
-              </a:spcAft>
-              <a:buSzPct val="100000"/>
-              <a:buChar char="•"/>
-              <a:lnSpc>
-                <a:spcPts val="2200"/>
-              </a:lnSpc>
-            </a:pPr>
-            <a:r>
-              <a:rPr sz="2000" b="0">
-                <a:solidFill>
-                  <a:srgbClr val="333333"/>
-                </a:solidFill>
-                <a:latin typeface="Calibri"/>
-              </a:rPr>
-              <a:t>In the browser lab track, open the </a:t>
-            </a:r>
-            <a:r>
-              <a:rPr sz="2000" b="1">
-                <a:solidFill>
-                  <a:srgbClr val="333333"/>
-                </a:solidFill>
-                <a:latin typeface="Calibri"/>
-              </a:rPr>
-              <a:t>legality-metrics</a:t>
-            </a:r>
-            <a:r>
-              <a:rPr sz="2000" b="0">
-                <a:solidFill>
-                  <a:srgbClr val="333333"/>
-                </a:solidFill>
-                <a:latin typeface="Calibri"/>
-              </a:rPr>
-              <a:t> lab from the tools shelf</a:t>
-            </a:r>
-          </a:p>
-          <a:p>
-            <a:pPr lvl="0" marL="457200" indent="-228600">
-              <a:buFont typeface="Calibri"/>
-              <a:spcAft>
-                <a:spcPts val="1000"/>
-              </a:spcAft>
-              <a:buSzPct val="100000"/>
-              <a:buChar char="•"/>
-              <a:lnSpc>
-                <a:spcPts val="2200"/>
-              </a:lnSpc>
-            </a:pPr>
-            <a:r>
-              <a:rPr sz="2000" b="0">
-                <a:solidFill>
-                  <a:srgbClr val="333333"/>
-                </a:solidFill>
-                <a:latin typeface="Calibri"/>
-              </a:rPr>
-              <a:t>Load the overlap or float starter, run the legalizer once</a:t>
-            </a:r>
-          </a:p>
-          <a:p>
-            <a:pPr lvl="0" marL="457200" indent="-228600">
-              <a:buFont typeface="Calibri"/>
-              <a:spcAft>
-                <a:spcPts val="1000"/>
-              </a:spcAft>
-              <a:buSzPct val="100000"/>
-              <a:buChar char="•"/>
-              <a:lnSpc>
-                <a:spcPts val="2200"/>
-              </a:lnSpc>
-            </a:pPr>
-            <a:r>
-              <a:rPr sz="2000" b="0">
-                <a:solidFill>
-                  <a:srgbClr val="333333"/>
-                </a:solidFill>
-                <a:latin typeface="Calibri"/>
-              </a:rPr>
-              <a:t>Work the challenges that lock the goldens</a:t>
-            </a:r>
-          </a:p>
-        </p:txBody>
-      </p:sp>
-      <p:sp>
-        <p:nvSpPr>
-          <p:cNvPr id="4" name="TextBox 3"/>
-          <p:cNvSpPr txBox="1"/>
-          <p:nvPr/>
-        </p:nvSpPr>
-        <p:spPr>
-          <a:xfrm>
-            <a:off x="548640" y="6355080"/>
-            <a:ext cx="11064240" cy="320040"/>
-          </a:xfrm>
-          <a:prstGeom prst="rect">
-            <a:avLst/>
-          </a:prstGeom>
-          <a:noFill/>
-        </p:spPr>
-        <p:txBody>
-          <a:bodyPr wrap="square">
-            <a:noAutofit/>
-          </a:bodyPr>
-          <a:lstStyle/>
-          <a:p>
-            <a:pPr algn="r">
-              <a:lnSpc>
-                <a:spcPts val="2200"/>
-              </a:lnSpc>
-              <a:defRPr sz="1000" b="0">
-                <a:solidFill>
-                  <a:srgbClr val="666666"/>
-                </a:solidFill>
-                <a:latin typeface="Calibri"/>
-              </a:defRPr>
-            </a:pPr>
-            <a:r>
-              <a:t>learn_legalization — 03 legality metrics</a:t>
-            </a:r>
-          </a:p>
-        </p:txBody>
-      </p:sp>
-    </p:spTree>
-  </p:cSld>
-  <p:clrMapOvr>
-    <a:masterClrMapping/>
-  </p:clrMapOvr>
-</p:sld>
-</file>
-
-<file path=ppt/slides/slide9.xml><?xml version="1.0" encoding="utf-8"?>
-<p:sld xmlns:a="http://schemas.openxmlformats.org/drawingml/2006/main" xmlns:p="http://schemas.openxmlformats.org/presentationml/2006/main" xmlns:r="http://schemas.openxmlformats.org/officeDocument/2006/relationships">
-  <p:cSld>
-    <p:spTree>
-      <p:nvGrpSpPr>
-        <p:cNvPr id="1" name=""/>
-        <p:cNvGrpSpPr/>
-        <p:nvPr/>
-      </p:nvGrpSpPr>
-      <p:grpSpPr/>
-      <p:sp>
-        <p:nvSpPr>
-          <p:cNvPr id="2" name="TextBox 1"/>
-          <p:cNvSpPr txBox="1"/>
-          <p:nvPr/>
-        </p:nvSpPr>
-        <p:spPr>
-          <a:xfrm>
-            <a:off x="548640" y="411480"/>
-            <a:ext cx="11064240" cy="777240"/>
-          </a:xfrm>
-          <a:prstGeom prst="rect">
-            <a:avLst/>
-          </a:prstGeom>
-          <a:noFill/>
-        </p:spPr>
-        <p:txBody>
-          <a:bodyPr wrap="square">
-            <a:noAutofit/>
-          </a:bodyPr>
-          <a:lstStyle/>
-          <a:p>
-            <a:pPr>
-              <a:lnSpc>
-                <a:spcPts val="2200"/>
-              </a:lnSpc>
-            </a:pPr>
-            <a:r>
-              <a:rPr sz="2800" b="1">
-                <a:solidFill>
-                  <a:srgbClr val="1A1A2E"/>
-                </a:solidFill>
-                <a:latin typeface="Calibri"/>
-              </a:rPr>
-              <a:t>Implement track</a:t>
-            </a:r>
-          </a:p>
-        </p:txBody>
-      </p:sp>
-      <p:sp>
-        <p:nvSpPr>
-          <p:cNvPr id="3" name="TextBox 2"/>
-          <p:cNvSpPr txBox="1"/>
-          <p:nvPr/>
-        </p:nvSpPr>
-        <p:spPr>
-          <a:xfrm>
-            <a:off x="548640" y="1234440"/>
-            <a:ext cx="11064240" cy="4937760"/>
-          </a:xfrm>
-          <a:prstGeom prst="rect">
-            <a:avLst/>
-          </a:prstGeom>
-          <a:noFill/>
-        </p:spPr>
-        <p:txBody>
-          <a:bodyPr wrap="square">
-            <a:noAutofit/>
-          </a:bodyPr>
-          <a:lstStyle/>
-          <a:p>
-            <a:pPr lvl="0" marL="457200" indent="-228600">
-              <a:buFont typeface="Calibri"/>
-              <a:spcAft>
-                <a:spcPts val="1000"/>
-              </a:spcAft>
-              <a:buSzPct val="100000"/>
-              <a:buChar char="•"/>
-              <a:lnSpc>
-                <a:spcPts val="2200"/>
-              </a:lnSpc>
-            </a:pPr>
-            <a:r>
-              <a:rPr sz="2000" b="0">
-                <a:solidFill>
-                  <a:srgbClr val="333333"/>
-                </a:solidFill>
-                <a:latin typeface="Calibri"/>
-              </a:rPr>
-              <a:t>In the implement track, open this module's examples and the course `common/` solvers</a:t>
-            </a:r>
-          </a:p>
-          <a:p>
-            <a:pPr lvl="0" marL="457200" indent="-228600">
-              <a:buFont typeface="Calibri"/>
-              <a:spcAft>
-                <a:spcPts val="1000"/>
-              </a:spcAft>
-              <a:buSzPct val="100000"/>
-              <a:buChar char="•"/>
-              <a:lnSpc>
-                <a:spcPts val="2200"/>
-              </a:lnSpc>
-            </a:pPr>
-            <a:r>
-              <a:rPr sz="2000" b="0">
-                <a:solidFill>
-                  <a:srgbClr val="333333"/>
-                </a:solidFill>
-                <a:latin typeface="Calibri"/>
-              </a:rPr>
-              <a:t>Parse `tiny_legal.json`, run the algorithm with deterministic coordinates</a:t>
-            </a:r>
-          </a:p>
-          <a:p>
-            <a:pPr lvl="0" marL="457200" indent="-228600">
-              <a:buFont typeface="Calibri"/>
-              <a:spcAft>
-                <a:spcPts val="1000"/>
-              </a:spcAft>
-              <a:buSzPct val="100000"/>
-              <a:buChar char="•"/>
-              <a:lnSpc>
-                <a:spcPts val="2200"/>
-              </a:lnSpc>
-            </a:pPr>
-            <a:r>
-              <a:rPr sz="2000" b="0">
-                <a:solidFill>
-                  <a:srgbClr val="333333"/>
-                </a:solidFill>
-                <a:latin typeface="Calibri"/>
-              </a:rPr>
-              <a:t>Match the browser goldens before you claim the checklist</a:t>
-            </a:r>
-          </a:p>
-        </p:txBody>
-      </p:sp>
-      <p:sp>
-        <p:nvSpPr>
-          <p:cNvPr id="4" name="TextBox 3"/>
           <p:cNvSpPr txBox="1"/>
           <p:nvPr/>
         </p:nvSpPr>
